--- a/Student_Dropout_Model_Presentation.pptx
+++ b/Student_Dropout_Model_Presentation.pptx
@@ -4221,8 +4221,38 @@
         </p:blipFill>
         <p:spPr>
           <a:xfrm>
-            <a:off x="1466283" y="3085104"/>
+            <a:off x="285125" y="3023492"/>
             <a:ext cx="4340157" cy="3834508"/>
+          </a:xfrm>
+          <a:prstGeom prst="rect">
+            <a:avLst/>
+          </a:prstGeom>
+        </p:spPr>
+      </p:pic>
+      <p:pic>
+        <p:nvPicPr>
+          <p:cNvPr id="12" name="Picture 11">
+            <a:extLst>
+              <a:ext uri="{FF2B5EF4-FFF2-40B4-BE49-F238E27FC236}">
+                <a16:creationId xmlns:a16="http://schemas.microsoft.com/office/drawing/2014/main" id="{F6D6A182-0EB9-EC43-0E92-B022D86C3881}"/>
+              </a:ext>
+            </a:extLst>
+          </p:cNvPr>
+          <p:cNvPicPr>
+            <a:picLocks noChangeAspect="1"/>
+          </p:cNvPicPr>
+          <p:nvPr/>
+        </p:nvPicPr>
+        <p:blipFill>
+          <a:blip r:embed="rId3"/>
+          <a:stretch>
+            <a:fillRect/>
+          </a:stretch>
+        </p:blipFill>
+        <p:spPr>
+          <a:xfrm>
+            <a:off x="4710631" y="3539029"/>
+            <a:ext cx="4433369" cy="2190750"/>
           </a:xfrm>
           <a:prstGeom prst="rect">
             <a:avLst/>
